--- a/Topic_A/Exam_Practice/AT-A-L07_Writing_Workshop_Body_Parts_and_Health_Problems.pptx
+++ b/Topic_A/Exam_Practice/AT-A-L07_Writing_Workshop_Body_Parts_and_Health_Problems.pptx
@@ -784,7 +784,11 @@
           <a:lstStyle/>
           <a:p>
             <a:r>
-              <a:rPr lang="en-US" dirty="0"/>
+              <a:rPr lang="ar-SA" dirty="0">
+                <a:latin typeface="Amiri" pitchFamily="2" charset="-78"/>
+                <a:ea typeface="Amiri" pitchFamily="2" charset="-78"/>
+                <a:cs typeface="Amiri" pitchFamily="2" charset="-78"/>
+              </a:rPr>
               <a:t>Q3 (3 min to choose and read). Title (أ) suits Core and Develop; title (ب) suits Stretch.</a:t>
             </a:r>
             <a:endParaRPr lang="en-US" dirty="0"/>
@@ -1403,7 +1407,11 @@
           <a:lstStyle/>
           <a:p>
             <a:r>
-              <a:rPr lang="en-US" dirty="0"/>
+              <a:rPr lang="ar-SA" dirty="0">
+                <a:latin typeface="Amiri" pitchFamily="2" charset="-78"/>
+                <a:ea typeface="Amiri" pitchFamily="2" charset="-78"/>
+                <a:cs typeface="Amiri" pitchFamily="2" charset="-78"/>
+              </a:rPr>
               <a:t>WELCOME (1 min) — while students join.
 • Greet each student by name as they arrive: السَّلَامُ عَلَيْكُمْ. Take the register (Pastoral Tracker: attendance 0/1).
 • 2-MINUTE CHECK-IN (SEND training): a private chat to any student who seemed unsettled last lesson — “Are you okay today? 👍 / 👎”.
@@ -1936,7 +1944,11 @@
           <a:lstStyle/>
           <a:p>
             <a:r>
-              <a:rPr lang="en-US" dirty="0"/>
+              <a:rPr lang="ar-SA" dirty="0">
+                <a:latin typeface="Amiri" pitchFamily="2" charset="-78"/>
+                <a:ea typeface="Amiri" pitchFamily="2" charset="-78"/>
+                <a:cs typeface="Amiri" pitchFamily="2" charset="-78"/>
+              </a:rPr>
               <a:t>Question words: لِمَاذَا (why) · مَا (what) · مُنْذُ مَتَى (since when) · مَاذَا (what) · مَتَى (when) — bullet 3 is PAST, bullet 4 is FUTURE.</a:t>
             </a:r>
             <a:endParaRPr lang="en-US" dirty="0"/>
@@ -2508,6 +2520,7 @@
                   <a:srgbClr val="D4AF37"/>
                 </a:solidFill>
                 <a:latin typeface="Amiri" pitchFamily="2" charset="-78"/>
+                <a:ea typeface="Amiri" pitchFamily="2" charset="-78"/>
                 <a:cs typeface="Amiri" pitchFamily="2" charset="-78"/>
               </a:rPr>
               <a:t>م</a:t>
@@ -2714,6 +2727,7 @@
                   <a:srgbClr val="D4AF37"/>
                 </a:solidFill>
                 <a:latin typeface="Amiri" pitchFamily="2" charset="-78"/>
+                <a:ea typeface="Amiri" pitchFamily="2" charset="-78"/>
                 <a:cs typeface="Amiri" pitchFamily="2" charset="-78"/>
               </a:rPr>
               <a:t>وَرْشَةُ الكِتَابَةِ — الجِسْمُ وَالمَشَاكِلُ الصِّحِّيَّةُ</a:t>
@@ -3171,6 +3185,7 @@
                   <a:srgbClr val="D4AF37"/>
                 </a:solidFill>
                 <a:latin typeface="Amiri" pitchFamily="2" charset="-78"/>
+                <a:ea typeface="Amiri" pitchFamily="2" charset="-78"/>
                 <a:cs typeface="Amiri" pitchFamily="2" charset="-78"/>
               </a:rPr>
               <a:t>م</a:t>
@@ -3491,6 +3506,7 @@
                   <a:srgbClr val="8A6D1E"/>
                 </a:solidFill>
                 <a:latin typeface="Amiri" pitchFamily="2" charset="-78"/>
+                <a:ea typeface="Amiri" pitchFamily="2" charset="-78"/>
                 <a:cs typeface="Amiri" pitchFamily="2" charset="-78"/>
               </a:rPr>
               <a:t>نَمُوذَجُ الإِجَابَةِ</a:t>
@@ -3604,6 +3620,7 @@
                   <a:srgbClr val="1F2A37"/>
                 </a:solidFill>
                 <a:latin typeface="Amiri" pitchFamily="2" charset="-78"/>
+                <a:ea typeface="Amiri" pitchFamily="2" charset="-78"/>
                 <a:cs typeface="Amiri" pitchFamily="2" charset="-78"/>
               </a:rPr>
               <a:t>مَرْحَبًا يَا أُسْتَاذُ أَحْمَدُ،</a:t>
@@ -3623,6 +3640,7 @@
                   <a:srgbClr val="1F2A37"/>
                 </a:solidFill>
                 <a:latin typeface="Amiri" pitchFamily="2" charset="-78"/>
+                <a:ea typeface="Amiri" pitchFamily="2" charset="-78"/>
                 <a:cs typeface="Amiri" pitchFamily="2" charset="-78"/>
               </a:rPr>
               <a:t>أَنَا سَامِي مِنَ الصَّفِّ العَاشِرِ. أَنَا آسِفٌ، لَا أَسْتَطِيعُ أَنْ آتِيَ إِلَى المَدْرَسَةِ اليَوْمَ، لِأَنِّي مَرِيضٌ. عِنْدِي حُمَّى وَسُعَالٌ، وَيُؤْلِمُنِي رَأْسِي كَثِيرًا. أَنَا مَرِيضٌ مُنْذُ يَوْمَيْنِ. أَمْسِ ذَهَبْتُ إِلَى الطَّبِيبِ مَعَ أُمِّي، وَأَعْطَانِي دَوَاءً. سَأَرْجِعُ إِلَى المَدْرَسَةِ يَوْمَ الأَحَدِ إِنْ شَاءَ اللّٰهُ. هَلْ يُمْكِنُ أَنْ تُرْسِلَ لِي الوَاجِبَ؟</a:t>
@@ -3642,6 +3660,7 @@
                   <a:srgbClr val="1F2A37"/>
                 </a:solidFill>
                 <a:latin typeface="Amiri" pitchFamily="2" charset="-78"/>
+                <a:ea typeface="Amiri" pitchFamily="2" charset="-78"/>
                 <a:cs typeface="Amiri" pitchFamily="2" charset="-78"/>
               </a:rPr>
               <a:t>شُكْرًا جَزِيلًا،</a:t>
@@ -3661,6 +3680,7 @@
                   <a:srgbClr val="1F2A37"/>
                 </a:solidFill>
                 <a:latin typeface="Amiri" pitchFamily="2" charset="-78"/>
+                <a:ea typeface="Amiri" pitchFamily="2" charset="-78"/>
                 <a:cs typeface="Amiri" pitchFamily="2" charset="-78"/>
               </a:rPr>
               <a:t>سَامِي</a:t>
@@ -3824,11 +3844,12 @@
               <a:buNone/>
             </a:pPr>
             <a:r>
-              <a:rPr lang="en-US" sz="950" b="1" dirty="0">
+              <a:rPr lang="ar-SA" sz="950" b="1" dirty="0">
                 <a:solidFill>
                   <a:srgbClr val="FFFFFF"/>
                 </a:solidFill>
                 <a:latin typeface="Calibri" pitchFamily="34" charset="0"/>
+                <a:ea typeface="Amiri" pitchFamily="2" charset="-78"/>
                 <a:cs typeface="Amiri" pitchFamily="2" charset="-78"/>
               </a:rPr>
               <a:t>لِأَنِّي مَرِيضٌ</a:t>
@@ -3889,11 +3910,12 @@
               <a:buNone/>
             </a:pPr>
             <a:r>
-              <a:rPr lang="en-US" sz="950" b="1" dirty="0">
+              <a:rPr lang="ar-SA" sz="950" b="1" dirty="0">
                 <a:solidFill>
                   <a:srgbClr val="FFFFFF"/>
                 </a:solidFill>
                 <a:latin typeface="Calibri" pitchFamily="34" charset="0"/>
+                <a:ea typeface="Amiri" pitchFamily="2" charset="-78"/>
                 <a:cs typeface="Amiri" pitchFamily="2" charset="-78"/>
               </a:rPr>
               <a:t>يُؤْلِمُنِي رَأْسِي</a:t>
@@ -3954,11 +3976,12 @@
               <a:buNone/>
             </a:pPr>
             <a:r>
-              <a:rPr lang="en-US" sz="950" b="1" dirty="0">
+              <a:rPr lang="ar-SA" sz="950" b="1" dirty="0">
                 <a:solidFill>
                   <a:srgbClr val="FFFFFF"/>
                 </a:solidFill>
                 <a:latin typeface="Calibri" pitchFamily="34" charset="0"/>
+                <a:ea typeface="Amiri" pitchFamily="2" charset="-78"/>
                 <a:cs typeface="Amiri" pitchFamily="2" charset="-78"/>
               </a:rPr>
               <a:t>مُنْذُ يَوْمَيْنِ</a:t>
@@ -4019,11 +4042,12 @@
               <a:buNone/>
             </a:pPr>
             <a:r>
-              <a:rPr lang="en-US" sz="950" b="1" dirty="0">
+              <a:rPr lang="ar-SA" sz="950" b="1" dirty="0">
                 <a:solidFill>
                   <a:srgbClr val="FFFFFF"/>
                 </a:solidFill>
                 <a:latin typeface="Calibri" pitchFamily="34" charset="0"/>
+                <a:ea typeface="Amiri" pitchFamily="2" charset="-78"/>
                 <a:cs typeface="Amiri" pitchFamily="2" charset="-78"/>
               </a:rPr>
               <a:t>سَأَرْجِعُ</a:t>
@@ -4157,6 +4181,7 @@
                   <a:srgbClr val="D4AF37"/>
                 </a:solidFill>
                 <a:latin typeface="Amiri" pitchFamily="2" charset="-78"/>
+                <a:ea typeface="Amiri" pitchFamily="2" charset="-78"/>
                 <a:cs typeface="Amiri" pitchFamily="2" charset="-78"/>
               </a:rPr>
               <a:t>م</a:t>
@@ -4477,6 +4502,7 @@
                   <a:srgbClr val="8A6D1E"/>
                 </a:solidFill>
                 <a:latin typeface="Amiri" pitchFamily="2" charset="-78"/>
+                <a:ea typeface="Amiri" pitchFamily="2" charset="-78"/>
                 <a:cs typeface="Amiri" pitchFamily="2" charset="-78"/>
               </a:rPr>
               <a:t>نَمُوذَجُ الإِجَابَةِ</a:t>
@@ -4590,6 +4616,7 @@
                   <a:srgbClr val="1F2A37"/>
                 </a:solidFill>
                 <a:latin typeface="Amiri" pitchFamily="2" charset="-78"/>
+                <a:ea typeface="Amiri" pitchFamily="2" charset="-78"/>
                 <a:cs typeface="Amiri" pitchFamily="2" charset="-78"/>
               </a:rPr>
               <a:t>حَضْرَةَ الأُسْتَاذِ أَحْمَدَ المُحْتَرَمِ،</a:t>
@@ -4609,6 +4636,7 @@
                   <a:srgbClr val="1F2A37"/>
                 </a:solidFill>
                 <a:latin typeface="Amiri" pitchFamily="2" charset="-78"/>
+                <a:ea typeface="Amiri" pitchFamily="2" charset="-78"/>
                 <a:cs typeface="Amiri" pitchFamily="2" charset="-78"/>
               </a:rPr>
               <a:t>تَحِيَّةً طَيِّبَةً، وَبَعْدُ، فَأَنَا سَامِي مِنَ الصَّفِّ العَاشِرِ، وَأَكْتُبُ إِلَيْكَ لِأَعْتَذِرَ عَنِ الغِيَابِ اليَوْمَ. أَنَا مَرِيضٌ مُنْذُ يَوْمِ الإِثْنَيْنِ؛ عِنْدِي حُمَّى شَدِيدَةٌ وَسُعَالٌ، وَيُؤْلِمُنِي رَأْسِي وَحَلْقِي، وَأَشْعُرُ بِتَعَبٍ شَدِيدٍ طُولَ اليَوْمِ، فَلَا أَسْتَطِيعُ أَنْ أُرَكِّزَ أَوْ أَدْرُسَ. بَدَأَتِ الأَعْرَاضُ عِنْدَمَا رَجَعْتُ مِنَ المُبَارَاةِ مُبْتَلًّا بِالمَطَرِ. أَمْسِ فَحَصَنِي الطَّبِيبُ، وَنَصَحَنِي بِأَنْ أَرْتَاحَ ثَلَاثَةَ أَيَّامٍ وَأَشْرَبَ سَوَائِلَ كَثِيرَةً. أَتَوَقَّعُ أَنْ أَرْجِعَ يَوْمَ الأَحَدِ، وَأَرْجُو أَنْ تُرْسِلَ لِي وَاجِبَ هٰذَا الأُسْبُوعِ لِكَيْ لَا يَفُوتَنِي شَيْءٌ.</a:t>
@@ -4628,6 +4656,7 @@
                   <a:srgbClr val="1F2A37"/>
                 </a:solidFill>
                 <a:latin typeface="Amiri" pitchFamily="2" charset="-78"/>
+                <a:ea typeface="Amiri" pitchFamily="2" charset="-78"/>
                 <a:cs typeface="Amiri" pitchFamily="2" charset="-78"/>
               </a:rPr>
               <a:t>مَعَ الشُّكْرِ وَالتَّقْدِيرِ،</a:t>
@@ -4647,6 +4676,7 @@
                   <a:srgbClr val="1F2A37"/>
                 </a:solidFill>
                 <a:latin typeface="Amiri" pitchFamily="2" charset="-78"/>
+                <a:ea typeface="Amiri" pitchFamily="2" charset="-78"/>
                 <a:cs typeface="Amiri" pitchFamily="2" charset="-78"/>
               </a:rPr>
               <a:t>سَامِي يُوسُفُ</a:t>
@@ -4810,11 +4840,12 @@
               <a:buNone/>
             </a:pPr>
             <a:r>
-              <a:rPr lang="en-US" sz="950" b="1" dirty="0">
+              <a:rPr lang="ar-SA" sz="950" b="1" dirty="0">
                 <a:solidFill>
                   <a:srgbClr val="FFFFFF"/>
                 </a:solidFill>
                 <a:latin typeface="Calibri" pitchFamily="34" charset="0"/>
+                <a:ea typeface="Amiri" pitchFamily="2" charset="-78"/>
                 <a:cs typeface="Amiri" pitchFamily="2" charset="-78"/>
               </a:rPr>
               <a:t>لِأَعْتَذِرَ عَنِ الغِيَابِ</a:t>
@@ -4875,11 +4906,12 @@
               <a:buNone/>
             </a:pPr>
             <a:r>
-              <a:rPr lang="en-US" sz="950" b="1" dirty="0">
+              <a:rPr lang="ar-SA" sz="950" b="1" dirty="0">
                 <a:solidFill>
                   <a:srgbClr val="FFFFFF"/>
                 </a:solidFill>
                 <a:latin typeface="Calibri" pitchFamily="34" charset="0"/>
+                <a:ea typeface="Amiri" pitchFamily="2" charset="-78"/>
                 <a:cs typeface="Amiri" pitchFamily="2" charset="-78"/>
               </a:rPr>
               <a:t>مُنْذُ يَوْمِ الإِثْنَيْنِ</a:t>
@@ -4940,11 +4972,12 @@
               <a:buNone/>
             </a:pPr>
             <a:r>
-              <a:rPr lang="en-US" sz="950" b="1" dirty="0">
+              <a:rPr lang="ar-SA" sz="950" b="1" dirty="0">
                 <a:solidFill>
                   <a:srgbClr val="FFFFFF"/>
                 </a:solidFill>
                 <a:latin typeface="Calibri" pitchFamily="34" charset="0"/>
+                <a:ea typeface="Amiri" pitchFamily="2" charset="-78"/>
                 <a:cs typeface="Amiri" pitchFamily="2" charset="-78"/>
               </a:rPr>
               <a:t>بَدَأَتِ الأَعْرَاضُ عِنْدَمَا</a:t>
@@ -5005,11 +5038,12 @@
               <a:buNone/>
             </a:pPr>
             <a:r>
-              <a:rPr lang="en-US" sz="950" b="1" dirty="0">
+              <a:rPr lang="ar-SA" sz="950" b="1" dirty="0">
                 <a:solidFill>
                   <a:srgbClr val="FFFFFF"/>
                 </a:solidFill>
                 <a:latin typeface="Calibri" pitchFamily="34" charset="0"/>
+                <a:ea typeface="Amiri" pitchFamily="2" charset="-78"/>
                 <a:cs typeface="Amiri" pitchFamily="2" charset="-78"/>
               </a:rPr>
               <a:t>لِكَيْ لَا يَفُوتَنِي</a:t>
@@ -5143,6 +5177,7 @@
                   <a:srgbClr val="D4AF37"/>
                 </a:solidFill>
                 <a:latin typeface="Amiri" pitchFamily="2" charset="-78"/>
+                <a:ea typeface="Amiri" pitchFamily="2" charset="-78"/>
                 <a:cs typeface="Amiri" pitchFamily="2" charset="-78"/>
               </a:rPr>
               <a:t>م</a:t>
@@ -5463,6 +5498,7 @@
                   <a:srgbClr val="8A6D1E"/>
                 </a:solidFill>
                 <a:latin typeface="Amiri" pitchFamily="2" charset="-78"/>
+                <a:ea typeface="Amiri" pitchFamily="2" charset="-78"/>
                 <a:cs typeface="Amiri" pitchFamily="2" charset="-78"/>
               </a:rPr>
               <a:t>اخْتَرْ عُنْوَانًا وَاحِدًا</a:t>
@@ -5743,6 +5779,7 @@
                   <a:srgbClr val="1B3B6F"/>
                 </a:solidFill>
                 <a:latin typeface="Amiri" pitchFamily="2" charset="-78"/>
+                <a:ea typeface="Amiri" pitchFamily="2" charset="-78"/>
                 <a:cs typeface="Amiri" pitchFamily="2" charset="-78"/>
               </a:rPr>
               <a:t>يَوْمَ كُنْتُ مَرِيضًا</a:t>
@@ -5781,6 +5818,7 @@
                   <a:srgbClr val="1B3B6F"/>
                 </a:solidFill>
                 <a:latin typeface="Amiri" pitchFamily="2" charset="-78"/>
+                <a:ea typeface="Amiri" pitchFamily="2" charset="-78"/>
                 <a:cs typeface="Amiri" pitchFamily="2" charset="-78"/>
               </a:rPr>
               <a:t>(أ)</a:t>
@@ -5887,6 +5925,7 @@
                   <a:srgbClr val="1B3B6F"/>
                 </a:solidFill>
                 <a:latin typeface="Amiri" pitchFamily="2" charset="-78"/>
+                <a:ea typeface="Amiri" pitchFamily="2" charset="-78"/>
                 <a:cs typeface="Amiri" pitchFamily="2" charset="-78"/>
               </a:rPr>
               <a:t>مَتَى وَكَيْفَ بَدَأَ المَرَضُ؟ · الأَعْرَاضُ وَزِيَارَةُ الطَّبِيبِ · كَيْفَ قَضَيْتَ أَيَّامَ المَرَضِ؟ · مَاذَا تَعَلَّمْتَ؟</a:t>
@@ -6018,6 +6057,7 @@
                   <a:srgbClr val="1B3B6F"/>
                 </a:solidFill>
                 <a:latin typeface="Amiri" pitchFamily="2" charset="-78"/>
+                <a:ea typeface="Amiri" pitchFamily="2" charset="-78"/>
                 <a:cs typeface="Amiri" pitchFamily="2" charset="-78"/>
               </a:rPr>
               <a:t>الوِقَايَةُ خَيْرٌ مِنَ العِلَاجِ</a:t>
@@ -6056,6 +6096,7 @@
                   <a:srgbClr val="1B3B6F"/>
                 </a:solidFill>
                 <a:latin typeface="Amiri" pitchFamily="2" charset="-78"/>
+                <a:ea typeface="Amiri" pitchFamily="2" charset="-78"/>
                 <a:cs typeface="Amiri" pitchFamily="2" charset="-78"/>
               </a:rPr>
               <a:t>(ب)</a:t>
@@ -6162,6 +6203,7 @@
                   <a:srgbClr val="1B3B6F"/>
                 </a:solidFill>
                 <a:latin typeface="Amiri" pitchFamily="2" charset="-78"/>
+                <a:ea typeface="Amiri" pitchFamily="2" charset="-78"/>
                 <a:cs typeface="Amiri" pitchFamily="2" charset="-78"/>
               </a:rPr>
               <a:t>عَادَاتٌ تَحْمِينَا مِنَ المَرَضِ · كَيْفَ تَغَيَّرَ الاهْتِمَامُ بِالصِّحَّةِ؟ · تَجْرِبَةٌ فِي مَدْرَسَتِكَ أَوْ أُسْرَتِكَ · رَأْيُكَ وَاقْتِرَاحَاتُكَ</a:t>
@@ -6361,6 +6403,7 @@
                   <a:srgbClr val="D4AF37"/>
                 </a:solidFill>
                 <a:latin typeface="Amiri" pitchFamily="2" charset="-78"/>
+                <a:ea typeface="Amiri" pitchFamily="2" charset="-78"/>
                 <a:cs typeface="Amiri" pitchFamily="2" charset="-78"/>
               </a:rPr>
               <a:t>م</a:t>
@@ -6681,6 +6724,7 @@
                   <a:srgbClr val="8A6D1E"/>
                 </a:solidFill>
                 <a:latin typeface="Amiri" pitchFamily="2" charset="-78"/>
+                <a:ea typeface="Amiri" pitchFamily="2" charset="-78"/>
                 <a:cs typeface="Amiri" pitchFamily="2" charset="-78"/>
               </a:rPr>
               <a:t>خُطَّةُ الكِتَابَةِ</a:t>
@@ -7305,6 +7349,7 @@
                   <a:srgbClr val="1B3B6F"/>
                 </a:solidFill>
                 <a:latin typeface="Amiri" pitchFamily="2" charset="-78"/>
+                <a:ea typeface="Amiri" pitchFamily="2" charset="-78"/>
                 <a:cs typeface="Amiri" pitchFamily="2" charset="-78"/>
               </a:rPr>
               <a:t>بَدَأَ كُلُّ شَيْءٍ عِنْدَمَا لَعِبْتُ تَحْتَ المَطَرِ.</a:t>
@@ -7404,6 +7449,7 @@
                   <a:srgbClr val="1B3B6F"/>
                 </a:solidFill>
                 <a:latin typeface="Amiri" pitchFamily="2" charset="-78"/>
+                <a:ea typeface="Amiri" pitchFamily="2" charset="-78"/>
                 <a:cs typeface="Amiri" pitchFamily="2" charset="-78"/>
               </a:rPr>
               <a:t>عِنْدِي صُدَاعٌ، وَتُؤْلِمُنِي رِجْلِي.</a:t>
@@ -7503,6 +7549,7 @@
                   <a:srgbClr val="1B3B6F"/>
                 </a:solidFill>
                 <a:latin typeface="Amiri" pitchFamily="2" charset="-78"/>
+                <a:ea typeface="Amiri" pitchFamily="2" charset="-78"/>
                 <a:cs typeface="Amiri" pitchFamily="2" charset="-78"/>
               </a:rPr>
               <a:t>سَأَهْتَمُّ بِصِحَّتِي أَكْثَرَ.</a:t>
@@ -7664,6 +7711,7 @@
                   <a:srgbClr val="1F2A37"/>
                 </a:solidFill>
                 <a:latin typeface="Amiri" pitchFamily="2" charset="-78"/>
+                <a:ea typeface="Amiri" pitchFamily="2" charset="-78"/>
                 <a:cs typeface="Amiri" pitchFamily="2" charset="-78"/>
               </a:rPr>
               <a:t>أ</a:t>
@@ -7690,6 +7738,7 @@
                   <a:srgbClr val="1F2A37"/>
                 </a:solidFill>
                 <a:latin typeface="Amiri" pitchFamily="2" charset="-78"/>
+                <a:ea typeface="Amiri" pitchFamily="2" charset="-78"/>
                 <a:cs typeface="Amiri" pitchFamily="2" charset="-78"/>
               </a:rPr>
               <a:t>ب</a:t>
@@ -7836,6 +7885,7 @@
                   <a:srgbClr val="D4AF37"/>
                 </a:solidFill>
                 <a:latin typeface="Amiri" pitchFamily="2" charset="-78"/>
+                <a:ea typeface="Amiri" pitchFamily="2" charset="-78"/>
                 <a:cs typeface="Amiri" pitchFamily="2" charset="-78"/>
               </a:rPr>
               <a:t>م</a:t>
@@ -8093,6 +8143,7 @@
                   <a:srgbClr val="8A6D1E"/>
                 </a:solidFill>
                 <a:latin typeface="Amiri" pitchFamily="2" charset="-78"/>
+                <a:ea typeface="Amiri" pitchFamily="2" charset="-78"/>
                 <a:cs typeface="Amiri" pitchFamily="2" charset="-78"/>
               </a:rPr>
               <a:t>أ</a:t>
@@ -8157,6 +8208,7 @@
                   <a:srgbClr val="1B3B6F"/>
                 </a:solidFill>
                 <a:latin typeface="Amiri" pitchFamily="2" charset="-78"/>
+                <a:ea typeface="Amiri" pitchFamily="2" charset="-78"/>
                 <a:cs typeface="Amiri" pitchFamily="2" charset="-78"/>
               </a:rPr>
               <a:t>أ</a:t>
@@ -8208,6 +8260,7 @@
                   <a:srgbClr val="8A6D1E"/>
                 </a:solidFill>
                 <a:latin typeface="Amiri" pitchFamily="2" charset="-78"/>
+                <a:ea typeface="Amiri" pitchFamily="2" charset="-78"/>
                 <a:cs typeface="Amiri" pitchFamily="2" charset="-78"/>
               </a:rPr>
               <a:t>نَمُوذَجُ الإِجَابَةِ</a:t>
@@ -8321,6 +8374,7 @@
                   <a:srgbClr val="1F2A37"/>
                 </a:solidFill>
                 <a:latin typeface="Amiri" pitchFamily="2" charset="-78"/>
+                <a:ea typeface="Amiri" pitchFamily="2" charset="-78"/>
                 <a:cs typeface="Amiri" pitchFamily="2" charset="-78"/>
               </a:rPr>
               <a:t>فِي الشِّتَاءِ المَاضِي كُنْتُ مَرِيضًا جِدًّا. فِي يَوْمِ الإِثْنَيْنِ رَجَعْتُ مِنَ المَدْرَسَةِ، وَكُنْتُ مُتْعَبًا. فِي اللَّيْلِ كَانَ عِنْدِي حُمَّى، وَكَانَ يُؤْلِمُنِي رَأْسِي وَبَطْنِي. لَمْ آكُلْ شَيْئًا، وَلَمْ أَنَمْ جَيِّدًا، لِأَنَّ الأَلَمَ كَانَ شَدِيدًا.</a:t>
@@ -8340,6 +8394,7 @@
                   <a:srgbClr val="1F2A37"/>
                 </a:solidFill>
                 <a:latin typeface="Amiri" pitchFamily="2" charset="-78"/>
+                <a:ea typeface="Amiri" pitchFamily="2" charset="-78"/>
                 <a:cs typeface="Amiri" pitchFamily="2" charset="-78"/>
               </a:rPr>
               <a:t>فِي الصَّبَاحِ ذَهَبْتُ إِلَى الطَّبِيبِ مَعَ أَبِي. سَأَلَنِي الطَّبِيبُ: «مُنْذُ مَتَى أَنْتَ مَرِيضٌ؟» قُلْتُ: «مُنْذُ أَمْسِ». فَحَصَنِي، وَقَالَ: «عِنْدَكَ زُكَامٌ شَدِيدٌ». أَعْطَانِي دَوَاءً، وَقَالَ: «يَجِبُ أَنْ تَرْتَاحَ».</a:t>
@@ -8359,6 +8414,7 @@
                   <a:srgbClr val="1F2A37"/>
                 </a:solidFill>
                 <a:latin typeface="Amiri" pitchFamily="2" charset="-78"/>
+                <a:ea typeface="Amiri" pitchFamily="2" charset="-78"/>
                 <a:cs typeface="Amiri" pitchFamily="2" charset="-78"/>
               </a:rPr>
               <a:t>بَقِيتُ فِي البَيْتِ أَرْبَعَةَ أَيَّامٍ. نِمْتُ كَثِيرًا، وَشَرِبْتُ الشَّايَ بِالعَسَلِ، وَطَبَخَتْ لِي أُمِّي الشُّورْبَةَ. كُنْتُ حَزِينًا، لِأَنِّي لَمْ أَلْعَبْ مَعَ أَصْدِقَائِي، لٰكِنَّ صَدِيقِي أَرْسَلَ لِي الوَاجِبَ.</a:t>
@@ -8378,6 +8434,7 @@
                   <a:srgbClr val="1F2A37"/>
                 </a:solidFill>
                 <a:latin typeface="Amiri" pitchFamily="2" charset="-78"/>
+                <a:ea typeface="Amiri" pitchFamily="2" charset="-78"/>
                 <a:cs typeface="Amiri" pitchFamily="2" charset="-78"/>
               </a:rPr>
               <a:t>الآنَ صِحَّتِي جَيِّدَةٌ، وَالحَمْدُ لِلّٰهِ. فِي رَأْيِي، يَجِبُ أَنْ نَغْسِلَ أَيْدِيَنَا، وَأَنْ نَلْبَسَ مَلَابِسَ دَافِئَةً فِي الشِّتَاءِ. فِي المُسْتَقْبَلِ سَأَهْتَمُّ بِصِحَّتِي أَكْثَرَ، وَسَأَنَامُ مُبَكِّرًا.</a:t>
@@ -8541,11 +8598,12 @@
               <a:buNone/>
             </a:pPr>
             <a:r>
-              <a:rPr lang="en-US" sz="950" b="1" dirty="0">
+              <a:rPr lang="ar-SA" sz="950" b="1" dirty="0">
                 <a:solidFill>
                   <a:srgbClr val="FFFFFF"/>
                 </a:solidFill>
                 <a:latin typeface="Calibri" pitchFamily="34" charset="0"/>
+                <a:ea typeface="Amiri" pitchFamily="2" charset="-78"/>
                 <a:cs typeface="Amiri" pitchFamily="2" charset="-78"/>
               </a:rPr>
               <a:t>كَانَ عِنْدِي حُمَّى</a:t>
@@ -8606,11 +8664,12 @@
               <a:buNone/>
             </a:pPr>
             <a:r>
-              <a:rPr lang="en-US" sz="950" b="1" dirty="0">
+              <a:rPr lang="ar-SA" sz="950" b="1" dirty="0">
                 <a:solidFill>
                   <a:srgbClr val="FFFFFF"/>
                 </a:solidFill>
                 <a:latin typeface="Calibri" pitchFamily="34" charset="0"/>
+                <a:ea typeface="Amiri" pitchFamily="2" charset="-78"/>
                 <a:cs typeface="Amiri" pitchFamily="2" charset="-78"/>
               </a:rPr>
               <a:t>مُنْذُ أَمْسِ</a:t>
@@ -8671,11 +8730,12 @@
               <a:buNone/>
             </a:pPr>
             <a:r>
-              <a:rPr lang="en-US" sz="950" b="1" dirty="0">
+              <a:rPr lang="ar-SA" sz="950" b="1" dirty="0">
                 <a:solidFill>
                   <a:srgbClr val="FFFFFF"/>
                 </a:solidFill>
                 <a:latin typeface="Calibri" pitchFamily="34" charset="0"/>
+                <a:ea typeface="Amiri" pitchFamily="2" charset="-78"/>
                 <a:cs typeface="Amiri" pitchFamily="2" charset="-78"/>
               </a:rPr>
               <a:t>أَرْبَعَةَ أَيَّامٍ</a:t>
@@ -8736,11 +8796,12 @@
               <a:buNone/>
             </a:pPr>
             <a:r>
-              <a:rPr lang="en-US" sz="950" b="1" dirty="0">
+              <a:rPr lang="ar-SA" sz="950" b="1" dirty="0">
                 <a:solidFill>
                   <a:srgbClr val="FFFFFF"/>
                 </a:solidFill>
                 <a:latin typeface="Calibri" pitchFamily="34" charset="0"/>
+                <a:ea typeface="Amiri" pitchFamily="2" charset="-78"/>
                 <a:cs typeface="Amiri" pitchFamily="2" charset="-78"/>
               </a:rPr>
               <a:t>يَجِبُ أَنْ نَغْسِلَ</a:t>
@@ -8874,6 +8935,7 @@
                   <a:srgbClr val="D4AF37"/>
                 </a:solidFill>
                 <a:latin typeface="Amiri" pitchFamily="2" charset="-78"/>
+                <a:ea typeface="Amiri" pitchFamily="2" charset="-78"/>
                 <a:cs typeface="Amiri" pitchFamily="2" charset="-78"/>
               </a:rPr>
               <a:t>م</a:t>
@@ -9131,6 +9193,7 @@
                   <a:srgbClr val="8A6D1E"/>
                 </a:solidFill>
                 <a:latin typeface="Amiri" pitchFamily="2" charset="-78"/>
+                <a:ea typeface="Amiri" pitchFamily="2" charset="-78"/>
                 <a:cs typeface="Amiri" pitchFamily="2" charset="-78"/>
               </a:rPr>
               <a:t>أ</a:t>
@@ -9195,6 +9258,7 @@
                   <a:srgbClr val="1B3B6F"/>
                 </a:solidFill>
                 <a:latin typeface="Amiri" pitchFamily="2" charset="-78"/>
+                <a:ea typeface="Amiri" pitchFamily="2" charset="-78"/>
                 <a:cs typeface="Amiri" pitchFamily="2" charset="-78"/>
               </a:rPr>
               <a:t>أ</a:t>
@@ -9246,6 +9310,7 @@
                   <a:srgbClr val="8A6D1E"/>
                 </a:solidFill>
                 <a:latin typeface="Amiri" pitchFamily="2" charset="-78"/>
+                <a:ea typeface="Amiri" pitchFamily="2" charset="-78"/>
                 <a:cs typeface="Amiri" pitchFamily="2" charset="-78"/>
               </a:rPr>
               <a:t>نَمُوذَجُ الإِجَابَةِ</a:t>
@@ -9359,6 +9424,7 @@
                   <a:srgbClr val="1F2A37"/>
                 </a:solidFill>
                 <a:latin typeface="Amiri" pitchFamily="2" charset="-78"/>
+                <a:ea typeface="Amiri" pitchFamily="2" charset="-78"/>
                 <a:cs typeface="Amiri" pitchFamily="2" charset="-78"/>
               </a:rPr>
               <a:t>لَنْ أَنْسَى الأُسْبُوعَ الَّذِي مَرِضْتُ فِيهِ قَبْلَ امْتِحَانَاتِ الشِّتَاءِ. بَدَأَ كُلُّ شَيْءٍ يَوْمَ السَّبْتِ، عِنْدَمَا لَعِبْتُ مُبَارَاةً تَحْتَ المَطَرِ، ثُمَّ رَجَعْتُ إِلَى البَيْتِ مُبْتَلًّا وَلَمْ أُغَيِّرْ مَلَابِسِي، لِأَنِّي كُنْتُ مُتْعَبًا جِدًّا، وَجَلَسْتُ أَمَامَ التِّلْفَازِ سَاعَتَيْنِ.</a:t>
@@ -9378,6 +9444,7 @@
                   <a:srgbClr val="1F2A37"/>
                 </a:solidFill>
                 <a:latin typeface="Amiri" pitchFamily="2" charset="-78"/>
+                <a:ea typeface="Amiri" pitchFamily="2" charset="-78"/>
                 <a:cs typeface="Amiri" pitchFamily="2" charset="-78"/>
               </a:rPr>
               <a:t>فِي اللَّيْلِ ارْتَفَعَتْ حَرَارَتِي، وَصَارَ يُؤْلِمُنِي حَلْقِي وَظَهْرِي، فَلَمْ أَسْتَطِعْ أَنْ أَنَامَ. فِي الصَّبَاحِ أَخَذَنِي أَبِي إِلَى الطَّبِيبِ، فَفَحَصَنِي وَقَالَ إِنَّ عِنْدِي التِهَابًا فِي الحَلْقِ، وَنَصَحَنِي بِأَنْ أَرْتَاحَ أُسْبُوعًا كَامِلًا.</a:t>
@@ -9397,6 +9464,7 @@
                   <a:srgbClr val="1F2A37"/>
                 </a:solidFill>
                 <a:latin typeface="Amiri" pitchFamily="2" charset="-78"/>
+                <a:ea typeface="Amiri" pitchFamily="2" charset="-78"/>
                 <a:cs typeface="Amiri" pitchFamily="2" charset="-78"/>
               </a:rPr>
               <a:t>كَانَ أَصْعَبُ شَيْءٍ أَنَّنِي كُنْتُ قَلِقًا عَلَى دُرُوسِي، لِأَنَّ الامْتِحَانَاتِ كَانَتْ قَرِيبَةً. لٰكِنَّ زُمَلَائِي كَانُوا رَائِعِينَ؛ أَرْسَلُوا لِي المُلَخَّصَاتِ، وَاتَّصَلَ بِي مُعَلِّمِي لِيَطْمَئِنَّ عَلَيَّ، أَمَّا أُمِّي فَكَانَتْ تُحَضِّرُ لِي الشُّورْبَةَ وَالشَّايَ بِالعَسَلِ كُلَّ يَوْمٍ.</a:t>
@@ -9416,6 +9484,7 @@
                   <a:srgbClr val="1F2A37"/>
                 </a:solidFill>
                 <a:latin typeface="Amiri" pitchFamily="2" charset="-78"/>
+                <a:ea typeface="Amiri" pitchFamily="2" charset="-78"/>
                 <a:cs typeface="Amiri" pitchFamily="2" charset="-78"/>
               </a:rPr>
               <a:t>تَعَلَّمْتُ مِنْ هٰذِهِ التَّجْرِبَةِ أَنَّ الصِّحَّةَ أَغْلَى مِنْ أَيِّ شَيْءٍ. صَحِيحٌ أَنَّ المَرَضَ كَانَ مُزْعِجًا، غَيْرَ أَنَّهُ عَلَّمَنِي أَنْ أَهْتَمَّ بِنَفْسِي. وَلَوْ رَجَعَ بِيَ الزَّمَنُ، لَغَيَّرْتُ مَلَابِسِي فَوْرًا بَعْدَ المُبَارَاةِ، وَلَشَرِبْتُ شَيْئًا دَافِئًا.</a:t>
@@ -9514,11 +9583,12 @@
               <a:buNone/>
             </a:pPr>
             <a:r>
-              <a:rPr lang="en-US" sz="950" b="1" dirty="0">
+              <a:rPr lang="ar-SA" sz="950" b="1" dirty="0">
                 <a:solidFill>
                   <a:srgbClr val="FFFFFF"/>
                 </a:solidFill>
                 <a:latin typeface="Calibri" pitchFamily="34" charset="0"/>
+                <a:ea typeface="Amiri" pitchFamily="2" charset="-78"/>
                 <a:cs typeface="Amiri" pitchFamily="2" charset="-78"/>
               </a:rPr>
               <a:t>لَنْ أَنْسَى الأُسْبُوعَ الَّذِي</a:t>
@@ -9579,11 +9649,12 @@
               <a:buNone/>
             </a:pPr>
             <a:r>
-              <a:rPr lang="en-US" sz="950" b="1" dirty="0">
+              <a:rPr lang="ar-SA" sz="950" b="1" dirty="0">
                 <a:solidFill>
                   <a:srgbClr val="FFFFFF"/>
                 </a:solidFill>
                 <a:latin typeface="Calibri" pitchFamily="34" charset="0"/>
+                <a:ea typeface="Amiri" pitchFamily="2" charset="-78"/>
                 <a:cs typeface="Amiri" pitchFamily="2" charset="-78"/>
               </a:rPr>
               <a:t>فَلَمْ أَسْتَطِعْ</a:t>
@@ -9644,11 +9715,12 @@
               <a:buNone/>
             </a:pPr>
             <a:r>
-              <a:rPr lang="en-US" sz="950" b="1" dirty="0">
+              <a:rPr lang="ar-SA" sz="950" b="1" dirty="0">
                 <a:solidFill>
                   <a:srgbClr val="FFFFFF"/>
                 </a:solidFill>
                 <a:latin typeface="Calibri" pitchFamily="34" charset="0"/>
+                <a:ea typeface="Amiri" pitchFamily="2" charset="-78"/>
                 <a:cs typeface="Amiri" pitchFamily="2" charset="-78"/>
               </a:rPr>
               <a:t>نَصَحَنِي بِأَنْ أَرْتَاحَ</a:t>
@@ -9709,11 +9781,12 @@
               <a:buNone/>
             </a:pPr>
             <a:r>
-              <a:rPr lang="en-US" sz="950" b="1" dirty="0">
+              <a:rPr lang="ar-SA" sz="950" b="1" dirty="0">
                 <a:solidFill>
                   <a:srgbClr val="FFFFFF"/>
                 </a:solidFill>
                 <a:latin typeface="Calibri" pitchFamily="34" charset="0"/>
+                <a:ea typeface="Amiri" pitchFamily="2" charset="-78"/>
                 <a:cs typeface="Amiri" pitchFamily="2" charset="-78"/>
               </a:rPr>
               <a:t>لَوْ رَجَعَ … لَغَيَّرْتُ</a:t>
@@ -9847,6 +9920,7 @@
                   <a:srgbClr val="D4AF37"/>
                 </a:solidFill>
                 <a:latin typeface="Amiri" pitchFamily="2" charset="-78"/>
+                <a:ea typeface="Amiri" pitchFamily="2" charset="-78"/>
                 <a:cs typeface="Amiri" pitchFamily="2" charset="-78"/>
               </a:rPr>
               <a:t>م</a:t>
@@ -10104,6 +10178,7 @@
                   <a:srgbClr val="8A6D1E"/>
                 </a:solidFill>
                 <a:latin typeface="Amiri" pitchFamily="2" charset="-78"/>
+                <a:ea typeface="Amiri" pitchFamily="2" charset="-78"/>
                 <a:cs typeface="Amiri" pitchFamily="2" charset="-78"/>
               </a:rPr>
               <a:t>ب</a:t>
@@ -10168,6 +10243,7 @@
                   <a:srgbClr val="1B3B6F"/>
                 </a:solidFill>
                 <a:latin typeface="Amiri" pitchFamily="2" charset="-78"/>
+                <a:ea typeface="Amiri" pitchFamily="2" charset="-78"/>
                 <a:cs typeface="Amiri" pitchFamily="2" charset="-78"/>
               </a:rPr>
               <a:t>ب</a:t>
@@ -10219,6 +10295,7 @@
                   <a:srgbClr val="8A6D1E"/>
                 </a:solidFill>
                 <a:latin typeface="Amiri" pitchFamily="2" charset="-78"/>
+                <a:ea typeface="Amiri" pitchFamily="2" charset="-78"/>
                 <a:cs typeface="Amiri" pitchFamily="2" charset="-78"/>
               </a:rPr>
               <a:t>نَمُوذَجُ الإِجَابَةِ</a:t>
@@ -10332,6 +10409,7 @@
                   <a:srgbClr val="1F2A37"/>
                 </a:solidFill>
                 <a:latin typeface="Amiri" pitchFamily="2" charset="-78"/>
+                <a:ea typeface="Amiri" pitchFamily="2" charset="-78"/>
                 <a:cs typeface="Amiri" pitchFamily="2" charset="-78"/>
               </a:rPr>
               <a:t>يَعْتَقِدُ كَثِيرٌ مِنَ النَّاسِ أَنَّ الصِّحَّةَ مَسْؤُولِيَّةُ الطَّبِيبِ وَحْدَهُ، أَمَّا أَنَا فَأَرَى أَنَّ الوِقَايَةَ تَبْدَأُ مِنْ عَادَاتِنَا اليَوْمِيَّةِ. فَغَسْلُ اليَدَيْنِ، وَالنَّوْمُ الكَافِي، وَالطَّعَامُ الصِّحِّيُّ تَحْمِينَا مِنْ أَمْرَاضٍ كَثِيرَةٍ قَبْلَ أَنْ نَحْتَاجَ إِلَى الدَّوَاءِ، وَكَذٰلِكَ الرِّيَاضَةُ الَّتِي تُقَوِّي جِسْمَنَا وَتُحَسِّنُ مِزَاجَنَا.</a:t>
@@ -10351,6 +10429,7 @@
                   <a:srgbClr val="1F2A37"/>
                 </a:solidFill>
                 <a:latin typeface="Amiri" pitchFamily="2" charset="-78"/>
+                <a:ea typeface="Amiri" pitchFamily="2" charset="-78"/>
                 <a:cs typeface="Amiri" pitchFamily="2" charset="-78"/>
               </a:rPr>
               <a:t>فِي المَاضِي كَانَ النَّاسُ يَنْتَظِرُونَ حَتَّى يَشْتَدَّ المَرَضُ، ثُمَّ يَذْهَبُونَ إِلَى الطَّبِيبِ. أَمَّا اليَوْمَ فَهُنَاكَ حَمَلَاتٌ لِلتَّطْعِيمِ وَالفَحْصِ المُبَكِّرِ فِي المَدَارِسِ، وَهٰذَا قَلَّلَ الأَمْرَاضَ كَثِيرًا، كَمَا أَصْبَحَتِ المَعْلُومَاتُ الصِّحِّيَّةُ مُتَوَفِّرَةً لِلْجَمِيعِ عَلَى الإِنْتَرْنِتِ.</a:t>
@@ -10370,6 +10449,7 @@
                   <a:srgbClr val="1F2A37"/>
                 </a:solidFill>
                 <a:latin typeface="Amiri" pitchFamily="2" charset="-78"/>
+                <a:ea typeface="Amiri" pitchFamily="2" charset="-78"/>
                 <a:cs typeface="Amiri" pitchFamily="2" charset="-78"/>
               </a:rPr>
               <a:t>فِي السَّنَةِ المَاضِيَةِ انْتَشَرَ الزُّكَامُ فِي صَفِّي، وَغَابَ نِصْفُ الطُّلَّابِ تَقْرِيبًا. فَقَرَّرَتِ المَدْرَسَةُ أَنْ تَضَعَ مُعَقِّمًا فِي كُلِّ فَصْلٍ، وَأَنْ تَطْلُبَ مِنَ الطُّلَّابِ المَرْضَى أَنْ يَبْقَوْا فِي بُيُوتِهِمْ، فَتَحَسَّنَ الوَضْعُ خِلَالَ أُسْبُوعَيْنِ.</a:t>
@@ -10389,6 +10469,7 @@
                   <a:srgbClr val="1F2A37"/>
                 </a:solidFill>
                 <a:latin typeface="Amiri" pitchFamily="2" charset="-78"/>
+                <a:ea typeface="Amiri" pitchFamily="2" charset="-78"/>
                 <a:cs typeface="Amiri" pitchFamily="2" charset="-78"/>
               </a:rPr>
               <a:t>صَحِيحٌ أَنَّ العِلَاجَ ضَرُورِيٌّ أَحْيَانًا، غَيْرَ أَنَّ الوِقَايَةَ أَسْهَلُ وَأَرْخَصُ. وَلَوِ اتَّبَعَ كُلُّ وَاحِدٍ مِنَّا هٰذِهِ العَادَاتِ البَسِيطَةَ، لَقَلَّتْ زِيَارَاتُنَا لِلطَّبِيبِ كَثِيرًا، وَلَعِشْنَا حَيَاةً أَسْعَدَ وَأَطْوَلَ.</a:t>
@@ -10487,11 +10568,12 @@
               <a:buNone/>
             </a:pPr>
             <a:r>
-              <a:rPr lang="en-US" sz="950" b="1" dirty="0">
+              <a:rPr lang="ar-SA" sz="950" b="1" dirty="0">
                 <a:solidFill>
                   <a:srgbClr val="FFFFFF"/>
                 </a:solidFill>
                 <a:latin typeface="Calibri" pitchFamily="34" charset="0"/>
+                <a:ea typeface="Amiri" pitchFamily="2" charset="-78"/>
                 <a:cs typeface="Amiri" pitchFamily="2" charset="-78"/>
               </a:rPr>
               <a:t>أَمَّا أَنَا فَأَرَى</a:t>
@@ -10552,11 +10634,12 @@
               <a:buNone/>
             </a:pPr>
             <a:r>
-              <a:rPr lang="en-US" sz="950" b="1" dirty="0">
+              <a:rPr lang="ar-SA" sz="950" b="1" dirty="0">
                 <a:solidFill>
                   <a:srgbClr val="FFFFFF"/>
                 </a:solidFill>
                 <a:latin typeface="Calibri" pitchFamily="34" charset="0"/>
+                <a:ea typeface="Amiri" pitchFamily="2" charset="-78"/>
                 <a:cs typeface="Amiri" pitchFamily="2" charset="-78"/>
               </a:rPr>
               <a:t>كَانَ النَّاسُ يَنْتَظِرُونَ</a:t>
@@ -10617,11 +10700,12 @@
               <a:buNone/>
             </a:pPr>
             <a:r>
-              <a:rPr lang="en-US" sz="950" b="1" dirty="0">
+              <a:rPr lang="ar-SA" sz="950" b="1" dirty="0">
                 <a:solidFill>
                   <a:srgbClr val="FFFFFF"/>
                 </a:solidFill>
                 <a:latin typeface="Calibri" pitchFamily="34" charset="0"/>
+                <a:ea typeface="Amiri" pitchFamily="2" charset="-78"/>
                 <a:cs typeface="Amiri" pitchFamily="2" charset="-78"/>
               </a:rPr>
               <a:t>فَقَرَّرَتِ المَدْرَسَةُ أَنْ</a:t>
@@ -10682,11 +10766,12 @@
               <a:buNone/>
             </a:pPr>
             <a:r>
-              <a:rPr lang="en-US" sz="950" b="1" dirty="0">
+              <a:rPr lang="ar-SA" sz="950" b="1" dirty="0">
                 <a:solidFill>
                   <a:srgbClr val="FFFFFF"/>
                 </a:solidFill>
                 <a:latin typeface="Calibri" pitchFamily="34" charset="0"/>
+                <a:ea typeface="Amiri" pitchFamily="2" charset="-78"/>
                 <a:cs typeface="Amiri" pitchFamily="2" charset="-78"/>
               </a:rPr>
               <a:t>لَوِ اتَّبَعَ … لَقَلَّتْ</a:t>
@@ -10820,6 +10905,7 @@
                   <a:srgbClr val="D4AF37"/>
                 </a:solidFill>
                 <a:latin typeface="Amiri" pitchFamily="2" charset="-78"/>
+                <a:ea typeface="Amiri" pitchFamily="2" charset="-78"/>
                 <a:cs typeface="Amiri" pitchFamily="2" charset="-78"/>
               </a:rPr>
               <a:t>م</a:t>
@@ -11140,6 +11226,7 @@
                   <a:srgbClr val="8A6D1E"/>
                 </a:solidFill>
                 <a:latin typeface="Amiri" pitchFamily="2" charset="-78"/>
+                <a:ea typeface="Amiri" pitchFamily="2" charset="-78"/>
                 <a:cs typeface="Amiri" pitchFamily="2" charset="-78"/>
               </a:rPr>
               <a:t>قَيِّمْ عَمَلَكَ</a:t>
@@ -12384,6 +12471,7 @@
                   <a:srgbClr val="FFFFFF"/>
                 </a:solidFill>
                 <a:latin typeface="Amiri" pitchFamily="2" charset="-78"/>
+                <a:ea typeface="Amiri" pitchFamily="2" charset="-78"/>
                 <a:cs typeface="Amiri" pitchFamily="2" charset="-78"/>
               </a:rPr>
               <a:t>أَحْسَنْتُمْ! إِلَى اللِّقَاءِ</a:t>
@@ -12536,6 +12624,7 @@
                   <a:srgbClr val="D4AF37"/>
                 </a:solidFill>
                 <a:latin typeface="Amiri" pitchFamily="2" charset="-78"/>
+                <a:ea typeface="Amiri" pitchFamily="2" charset="-78"/>
                 <a:cs typeface="Amiri" pitchFamily="2" charset="-78"/>
               </a:rPr>
               <a:t>وَرْشَةُ التَّدْرِيبِ</a:t>
@@ -12669,6 +12758,7 @@
                   <a:srgbClr val="D4AF37"/>
                 </a:solidFill>
                 <a:latin typeface="Amiri" pitchFamily="2" charset="-78"/>
+                <a:ea typeface="Amiri" pitchFamily="2" charset="-78"/>
                 <a:cs typeface="Amiri" pitchFamily="2" charset="-78"/>
               </a:rPr>
               <a:t>م</a:t>
@@ -12989,6 +13079,7 @@
                   <a:srgbClr val="8A6D1E"/>
                 </a:solidFill>
                 <a:latin typeface="Amiri" pitchFamily="2" charset="-78"/>
+                <a:ea typeface="Amiri" pitchFamily="2" charset="-78"/>
                 <a:cs typeface="Amiri" pitchFamily="2" charset="-78"/>
               </a:rPr>
               <a:t>آدَابُ الصَّفِّ</a:t>
@@ -14520,6 +14611,7 @@
                   <a:srgbClr val="D4AF37"/>
                 </a:solidFill>
                 <a:latin typeface="Amiri" pitchFamily="2" charset="-78"/>
+                <a:ea typeface="Amiri" pitchFamily="2" charset="-78"/>
                 <a:cs typeface="Amiri" pitchFamily="2" charset="-78"/>
               </a:rPr>
               <a:t>م</a:t>
@@ -14840,6 +14932,7 @@
                   <a:srgbClr val="8A6D1E"/>
                 </a:solidFill>
                 <a:latin typeface="Amiri" pitchFamily="2" charset="-78"/>
+                <a:ea typeface="Amiri" pitchFamily="2" charset="-78"/>
                 <a:cs typeface="Amiri" pitchFamily="2" charset="-78"/>
               </a:rPr>
               <a:t>خَرِيطَةُ الوَرْشَةِ</a:t>
@@ -15154,6 +15247,7 @@
                   <a:srgbClr val="1B3B6F"/>
                 </a:solidFill>
                 <a:latin typeface="Amiri" pitchFamily="2" charset="-78"/>
+                <a:ea typeface="Amiri" pitchFamily="2" charset="-78"/>
                 <a:cs typeface="Amiri" pitchFamily="2" charset="-78"/>
               </a:rPr>
               <a:t>كَيْفَ</a:t>
@@ -15430,6 +15524,7 @@
                   <a:srgbClr val="1E6B52"/>
                 </a:solidFill>
                 <a:latin typeface="Amiri" pitchFamily="2" charset="-78"/>
+                <a:ea typeface="Amiri" pitchFamily="2" charset="-78"/>
                 <a:cs typeface="Amiri" pitchFamily="2" charset="-78"/>
               </a:rPr>
               <a:t>الاسْتِمَارَةُ</a:t>
@@ -15706,6 +15801,7 @@
                   <a:srgbClr val="1E6B52"/>
                 </a:solidFill>
                 <a:latin typeface="Amiri" pitchFamily="2" charset="-78"/>
+                <a:ea typeface="Amiri" pitchFamily="2" charset="-78"/>
                 <a:cs typeface="Amiri" pitchFamily="2" charset="-78"/>
               </a:rPr>
               <a:t>الرِّسَالَةُ</a:t>
@@ -15982,6 +16078,7 @@
                   <a:srgbClr val="1E6B52"/>
                 </a:solidFill>
                 <a:latin typeface="Amiri" pitchFamily="2" charset="-78"/>
+                <a:ea typeface="Amiri" pitchFamily="2" charset="-78"/>
                 <a:cs typeface="Amiri" pitchFamily="2" charset="-78"/>
               </a:rPr>
               <a:t>المَقَالُ</a:t>
@@ -16258,6 +16355,7 @@
                   <a:srgbClr val="8A6D1E"/>
                 </a:solidFill>
                 <a:latin typeface="Amiri" pitchFamily="2" charset="-78"/>
+                <a:ea typeface="Amiri" pitchFamily="2" charset="-78"/>
                 <a:cs typeface="Amiri" pitchFamily="2" charset="-78"/>
               </a:rPr>
               <a:t>قَيِّمْ</a:t>
@@ -16501,6 +16599,7 @@
                   <a:srgbClr val="D4AF37"/>
                 </a:solidFill>
                 <a:latin typeface="Amiri" pitchFamily="2" charset="-78"/>
+                <a:ea typeface="Amiri" pitchFamily="2" charset="-78"/>
                 <a:cs typeface="Amiri" pitchFamily="2" charset="-78"/>
               </a:rPr>
               <a:t>م</a:t>
@@ -16821,6 +16920,7 @@
                   <a:srgbClr val="8A6D1E"/>
                 </a:solidFill>
                 <a:latin typeface="Amiri" pitchFamily="2" charset="-78"/>
+                <a:ea typeface="Amiri" pitchFamily="2" charset="-78"/>
                 <a:cs typeface="Amiri" pitchFamily="2" charset="-78"/>
               </a:rPr>
               <a:t>امْتِحَانُ الكِتَابَةِ</a:t>
@@ -17445,6 +17545,7 @@
                   <a:srgbClr val="1B3B6F"/>
                 </a:solidFill>
                 <a:latin typeface="Amiri" pitchFamily="2" charset="-78"/>
+                <a:ea typeface="Amiri" pitchFamily="2" charset="-78"/>
                 <a:cs typeface="Amiri" pitchFamily="2" charset="-78"/>
               </a:rPr>
               <a:t>يُؤْلِمُنِي رَأْسِي · تُؤْلِمُنِي يَدِي</a:t>
@@ -17544,6 +17645,7 @@
                   <a:srgbClr val="1B3B6F"/>
                 </a:solidFill>
                 <a:latin typeface="Amiri" pitchFamily="2" charset="-78"/>
+                <a:ea typeface="Amiri" pitchFamily="2" charset="-78"/>
                 <a:cs typeface="Amiri" pitchFamily="2" charset="-78"/>
               </a:rPr>
               <a:t>عِنْدِي حُمَّى مُنْذُ يَوْمَيْنِ</a:t>
@@ -17643,6 +17745,7 @@
                   <a:srgbClr val="1B3B6F"/>
                 </a:solidFill>
                 <a:latin typeface="Amiri" pitchFamily="2" charset="-78"/>
+                <a:ea typeface="Amiri" pitchFamily="2" charset="-78"/>
                 <a:cs typeface="Amiri" pitchFamily="2" charset="-78"/>
               </a:rPr>
               <a:t>بَدَأَتِ الأَعْرَاضُ عِنْدَمَا …</a:t>
@@ -17814,6 +17917,7 @@
                   <a:srgbClr val="D4AF37"/>
                 </a:solidFill>
                 <a:latin typeface="Amiri" pitchFamily="2" charset="-78"/>
+                <a:ea typeface="Amiri" pitchFamily="2" charset="-78"/>
                 <a:cs typeface="Amiri" pitchFamily="2" charset="-78"/>
               </a:rPr>
               <a:t>م</a:t>
@@ -18134,6 +18238,7 @@
                   <a:srgbClr val="8A6D1E"/>
                 </a:solidFill>
                 <a:latin typeface="Amiri" pitchFamily="2" charset="-78"/>
+                <a:ea typeface="Amiri" pitchFamily="2" charset="-78"/>
                 <a:cs typeface="Amiri" pitchFamily="2" charset="-78"/>
               </a:rPr>
               <a:t>اسْتِمَارَةُ العِيَادَةِ</a:t>
@@ -18490,6 +18595,7 @@
                   <a:srgbClr val="1B3B6F"/>
                 </a:solidFill>
                 <a:latin typeface="Amiri" pitchFamily="2" charset="-78"/>
+                <a:ea typeface="Amiri" pitchFamily="2" charset="-78"/>
                 <a:cs typeface="Amiri" pitchFamily="2" charset="-78"/>
               </a:rPr>
               <a:t>الاسْمُ</a:t>
@@ -18734,6 +18840,7 @@
                   <a:srgbClr val="1B3B6F"/>
                 </a:solidFill>
                 <a:latin typeface="Amiri" pitchFamily="2" charset="-78"/>
+                <a:ea typeface="Amiri" pitchFamily="2" charset="-78"/>
                 <a:cs typeface="Amiri" pitchFamily="2" charset="-78"/>
               </a:rPr>
               <a:t>العُمْرُ</a:t>
@@ -18978,6 +19085,7 @@
                   <a:srgbClr val="1B3B6F"/>
                 </a:solidFill>
                 <a:latin typeface="Amiri" pitchFamily="2" charset="-78"/>
+                <a:ea typeface="Amiri" pitchFamily="2" charset="-78"/>
                 <a:cs typeface="Amiri" pitchFamily="2" charset="-78"/>
               </a:rPr>
               <a:t>أَيْنَ الأَلَمُ؟</a:t>
@@ -19222,6 +19330,7 @@
                   <a:srgbClr val="1B3B6F"/>
                 </a:solidFill>
                 <a:latin typeface="Amiri" pitchFamily="2" charset="-78"/>
+                <a:ea typeface="Amiri" pitchFamily="2" charset="-78"/>
                 <a:cs typeface="Amiri" pitchFamily="2" charset="-78"/>
               </a:rPr>
               <a:t>الأَعْرَاضُ</a:t>
@@ -19466,6 +19575,7 @@
                   <a:srgbClr val="1B3B6F"/>
                 </a:solidFill>
                 <a:latin typeface="Amiri" pitchFamily="2" charset="-78"/>
+                <a:ea typeface="Amiri" pitchFamily="2" charset="-78"/>
                 <a:cs typeface="Amiri" pitchFamily="2" charset="-78"/>
               </a:rPr>
               <a:t>مُنْذُ مَتَى؟</a:t>
@@ -19710,6 +19820,7 @@
                   <a:srgbClr val="1B3B6F"/>
                 </a:solidFill>
                 <a:latin typeface="Amiri" pitchFamily="2" charset="-78"/>
+                <a:ea typeface="Amiri" pitchFamily="2" charset="-78"/>
                 <a:cs typeface="Amiri" pitchFamily="2" charset="-78"/>
               </a:rPr>
               <a:t>هَلْ أَخَذْتَ دَوَاءً؟</a:t>
@@ -19954,6 +20065,7 @@
                   <a:srgbClr val="1B3B6F"/>
                 </a:solidFill>
                 <a:latin typeface="Amiri" pitchFamily="2" charset="-78"/>
+                <a:ea typeface="Amiri" pitchFamily="2" charset="-78"/>
                 <a:cs typeface="Amiri" pitchFamily="2" charset="-78"/>
               </a:rPr>
               <a:t>حَسَاسِيَّةٌ</a:t>
@@ -20133,6 +20245,7 @@
                   <a:srgbClr val="1B3B6F"/>
                 </a:solidFill>
                 <a:latin typeface="Amiri" pitchFamily="2" charset="-78"/>
+                <a:ea typeface="Amiri" pitchFamily="2" charset="-78"/>
                 <a:cs typeface="Amiri" pitchFamily="2" charset="-78"/>
               </a:rPr>
               <a:t>جُمْلَةٌ: كَيْفَ بَدَأَ المَرَضُ؟</a:t>
@@ -20342,6 +20455,7 @@
                   <a:srgbClr val="D4AF37"/>
                 </a:solidFill>
                 <a:latin typeface="Amiri" pitchFamily="2" charset="-78"/>
+                <a:ea typeface="Amiri" pitchFamily="2" charset="-78"/>
                 <a:cs typeface="Amiri" pitchFamily="2" charset="-78"/>
               </a:rPr>
               <a:t>م</a:t>
@@ -20662,6 +20776,7 @@
                   <a:srgbClr val="8A6D1E"/>
                 </a:solidFill>
                 <a:latin typeface="Amiri" pitchFamily="2" charset="-78"/>
+                <a:ea typeface="Amiri" pitchFamily="2" charset="-78"/>
                 <a:cs typeface="Amiri" pitchFamily="2" charset="-78"/>
               </a:rPr>
               <a:t>نَمُوذَجُ الإِجَابَةِ</a:t>
@@ -20980,6 +21095,7 @@
                   <a:srgbClr val="1B3B6F"/>
                 </a:solidFill>
                 <a:latin typeface="Amiri" pitchFamily="2" charset="-78"/>
+                <a:ea typeface="Amiri" pitchFamily="2" charset="-78"/>
                 <a:cs typeface="Amiri" pitchFamily="2" charset="-78"/>
               </a:rPr>
               <a:t>سَامِي يُوسُفُ</a:t>
@@ -21018,6 +21134,7 @@
                   <a:srgbClr val="1B3B6F"/>
                 </a:solidFill>
                 <a:latin typeface="Amiri" pitchFamily="2" charset="-78"/>
+                <a:ea typeface="Amiri" pitchFamily="2" charset="-78"/>
                 <a:cs typeface="Amiri" pitchFamily="2" charset="-78"/>
               </a:rPr>
               <a:t>الاسْمُ</a:t>
@@ -21159,6 +21276,7 @@
                   <a:srgbClr val="1B3B6F"/>
                 </a:solidFill>
                 <a:latin typeface="Amiri" pitchFamily="2" charset="-78"/>
+                <a:ea typeface="Amiri" pitchFamily="2" charset="-78"/>
                 <a:cs typeface="Amiri" pitchFamily="2" charset="-78"/>
               </a:rPr>
               <a:t>خَمْسَ عَشْرَةَ سَنَةً</a:t>
@@ -21197,6 +21315,7 @@
                   <a:srgbClr val="1B3B6F"/>
                 </a:solidFill>
                 <a:latin typeface="Amiri" pitchFamily="2" charset="-78"/>
+                <a:ea typeface="Amiri" pitchFamily="2" charset="-78"/>
                 <a:cs typeface="Amiri" pitchFamily="2" charset="-78"/>
               </a:rPr>
               <a:t>العُمْرُ</a:t>
@@ -21338,6 +21457,7 @@
                   <a:srgbClr val="1B3B6F"/>
                 </a:solidFill>
                 <a:latin typeface="Amiri" pitchFamily="2" charset="-78"/>
+                <a:ea typeface="Amiri" pitchFamily="2" charset="-78"/>
                 <a:cs typeface="Amiri" pitchFamily="2" charset="-78"/>
               </a:rPr>
               <a:t>الرَّأْسُ وَالحَلْقُ</a:t>
@@ -21376,6 +21496,7 @@
                   <a:srgbClr val="1B3B6F"/>
                 </a:solidFill>
                 <a:latin typeface="Amiri" pitchFamily="2" charset="-78"/>
+                <a:ea typeface="Amiri" pitchFamily="2" charset="-78"/>
                 <a:cs typeface="Amiri" pitchFamily="2" charset="-78"/>
               </a:rPr>
               <a:t>أَيْنَ الأَلَمُ؟</a:t>
@@ -21517,6 +21638,7 @@
                   <a:srgbClr val="1B3B6F"/>
                 </a:solidFill>
                 <a:latin typeface="Amiri" pitchFamily="2" charset="-78"/>
+                <a:ea typeface="Amiri" pitchFamily="2" charset="-78"/>
                 <a:cs typeface="Amiri" pitchFamily="2" charset="-78"/>
               </a:rPr>
               <a:t>حُمَّى وَسُعَالٌ</a:t>
@@ -21555,6 +21677,7 @@
                   <a:srgbClr val="1B3B6F"/>
                 </a:solidFill>
                 <a:latin typeface="Amiri" pitchFamily="2" charset="-78"/>
+                <a:ea typeface="Amiri" pitchFamily="2" charset="-78"/>
                 <a:cs typeface="Amiri" pitchFamily="2" charset="-78"/>
               </a:rPr>
               <a:t>الأَعْرَاضُ</a:t>
@@ -21696,6 +21819,7 @@
                   <a:srgbClr val="1B3B6F"/>
                 </a:solidFill>
                 <a:latin typeface="Amiri" pitchFamily="2" charset="-78"/>
+                <a:ea typeface="Amiri" pitchFamily="2" charset="-78"/>
                 <a:cs typeface="Amiri" pitchFamily="2" charset="-78"/>
               </a:rPr>
               <a:t>مُنْذُ يَوْمَيْنِ</a:t>
@@ -21734,6 +21858,7 @@
                   <a:srgbClr val="1B3B6F"/>
                 </a:solidFill>
                 <a:latin typeface="Amiri" pitchFamily="2" charset="-78"/>
+                <a:ea typeface="Amiri" pitchFamily="2" charset="-78"/>
                 <a:cs typeface="Amiri" pitchFamily="2" charset="-78"/>
               </a:rPr>
               <a:t>مُنْذُ مَتَى؟</a:t>
@@ -21875,6 +22000,7 @@
                   <a:srgbClr val="1B3B6F"/>
                 </a:solidFill>
                 <a:latin typeface="Amiri" pitchFamily="2" charset="-78"/>
+                <a:ea typeface="Amiri" pitchFamily="2" charset="-78"/>
                 <a:cs typeface="Amiri" pitchFamily="2" charset="-78"/>
               </a:rPr>
               <a:t>نَعَمْ، دَوَاءً لِلصُّدَاعِ</a:t>
@@ -21913,6 +22039,7 @@
                   <a:srgbClr val="1B3B6F"/>
                 </a:solidFill>
                 <a:latin typeface="Amiri" pitchFamily="2" charset="-78"/>
+                <a:ea typeface="Amiri" pitchFamily="2" charset="-78"/>
                 <a:cs typeface="Amiri" pitchFamily="2" charset="-78"/>
               </a:rPr>
               <a:t>هَلْ أَخَذْتَ دَوَاءً؟</a:t>
@@ -22054,6 +22181,7 @@
                   <a:srgbClr val="1B3B6F"/>
                 </a:solidFill>
                 <a:latin typeface="Amiri" pitchFamily="2" charset="-78"/>
+                <a:ea typeface="Amiri" pitchFamily="2" charset="-78"/>
                 <a:cs typeface="Amiri" pitchFamily="2" charset="-78"/>
               </a:rPr>
               <a:t>حَسَاسِيَّةٌ مِنَ الفُولِ السُّودَانِيِّ</a:t>
@@ -22092,6 +22220,7 @@
                   <a:srgbClr val="1B3B6F"/>
                 </a:solidFill>
                 <a:latin typeface="Amiri" pitchFamily="2" charset="-78"/>
+                <a:ea typeface="Amiri" pitchFamily="2" charset="-78"/>
                 <a:cs typeface="Amiri" pitchFamily="2" charset="-78"/>
               </a:rPr>
               <a:t>حَسَاسِيَّةٌ</a:t>
@@ -22233,6 +22362,7 @@
                   <a:srgbClr val="1B3B6F"/>
                 </a:solidFill>
                 <a:latin typeface="Amiri" pitchFamily="2" charset="-78"/>
+                <a:ea typeface="Amiri" pitchFamily="2" charset="-78"/>
                 <a:cs typeface="Amiri" pitchFamily="2" charset="-78"/>
               </a:rPr>
               <a:t>بَدَأَ المَرَضُ عِنْدَمَا لَعِبْتُ تَحْتَ المَطَرِ يَوْمَ السَّبْتِ.</a:t>
@@ -22271,6 +22401,7 @@
                   <a:srgbClr val="1B3B6F"/>
                 </a:solidFill>
                 <a:latin typeface="Amiri" pitchFamily="2" charset="-78"/>
+                <a:ea typeface="Amiri" pitchFamily="2" charset="-78"/>
                 <a:cs typeface="Amiri" pitchFamily="2" charset="-78"/>
               </a:rPr>
               <a:t>جُمْلَةٌ: كَيْفَ بَدَأَ المَرَضُ؟</a:t>
@@ -22480,6 +22611,7 @@
                   <a:srgbClr val="D4AF37"/>
                 </a:solidFill>
                 <a:latin typeface="Amiri" pitchFamily="2" charset="-78"/>
+                <a:ea typeface="Amiri" pitchFamily="2" charset="-78"/>
                 <a:cs typeface="Amiri" pitchFamily="2" charset="-78"/>
               </a:rPr>
               <a:t>م</a:t>
@@ -22800,6 +22932,7 @@
                   <a:srgbClr val="8A6D1E"/>
                 </a:solidFill>
                 <a:latin typeface="Amiri" pitchFamily="2" charset="-78"/>
+                <a:ea typeface="Amiri" pitchFamily="2" charset="-78"/>
                 <a:cs typeface="Amiri" pitchFamily="2" charset="-78"/>
               </a:rPr>
               <a:t>رِسَالَةُ اعْتِذَارٍ عَنِ الغِيَابِ</a:t>
@@ -23275,6 +23408,7 @@
                   <a:srgbClr val="1B3B6F"/>
                 </a:solidFill>
                 <a:latin typeface="Amiri" pitchFamily="2" charset="-78"/>
+                <a:ea typeface="Amiri" pitchFamily="2" charset="-78"/>
                 <a:cs typeface="Amiri" pitchFamily="2" charset="-78"/>
               </a:rPr>
               <a:t>أَنَا آسِفٌ، لَا أَسْتَطِيعُ أَنْ …</a:t>
@@ -23351,6 +23485,7 @@
                   <a:srgbClr val="1B3B6F"/>
                 </a:solidFill>
                 <a:latin typeface="Amiri" pitchFamily="2" charset="-78"/>
+                <a:ea typeface="Amiri" pitchFamily="2" charset="-78"/>
                 <a:cs typeface="Amiri" pitchFamily="2" charset="-78"/>
               </a:rPr>
               <a:t>عِنْدِي … وَيُؤْلِمُنِي …</a:t>
@@ -23427,6 +23562,7 @@
                   <a:srgbClr val="1B3B6F"/>
                 </a:solidFill>
                 <a:latin typeface="Amiri" pitchFamily="2" charset="-78"/>
+                <a:ea typeface="Amiri" pitchFamily="2" charset="-78"/>
                 <a:cs typeface="Amiri" pitchFamily="2" charset="-78"/>
               </a:rPr>
               <a:t>أَنَا مَرِيضٌ مُنْذُ …</a:t>
@@ -23503,6 +23639,7 @@
                   <a:srgbClr val="1B3B6F"/>
                 </a:solidFill>
                 <a:latin typeface="Amiri" pitchFamily="2" charset="-78"/>
+                <a:ea typeface="Amiri" pitchFamily="2" charset="-78"/>
                 <a:cs typeface="Amiri" pitchFamily="2" charset="-78"/>
               </a:rPr>
               <a:t>هَلْ يُمْكِنُ أَنْ تُرْسِلَ لِي …؟</a:t>
@@ -23674,6 +23811,7 @@
                   <a:srgbClr val="D4AF37"/>
                 </a:solidFill>
                 <a:latin typeface="Amiri" pitchFamily="2" charset="-78"/>
+                <a:ea typeface="Amiri" pitchFamily="2" charset="-78"/>
                 <a:cs typeface="Amiri" pitchFamily="2" charset="-78"/>
               </a:rPr>
               <a:t>م</a:t>
@@ -23994,6 +24132,7 @@
                   <a:srgbClr val="8A6D1E"/>
                 </a:solidFill>
                 <a:latin typeface="Amiri" pitchFamily="2" charset="-78"/>
+                <a:ea typeface="Amiri" pitchFamily="2" charset="-78"/>
                 <a:cs typeface="Amiri" pitchFamily="2" charset="-78"/>
               </a:rPr>
               <a:t>نَصُّ السُّؤَالِ</a:t>
@@ -24274,6 +24413,7 @@
                   <a:srgbClr val="1B3B6F"/>
                 </a:solidFill>
                 <a:latin typeface="Amiri" pitchFamily="2" charset="-78"/>
+                <a:ea typeface="Amiri" pitchFamily="2" charset="-78"/>
                 <a:cs typeface="Amiri" pitchFamily="2" charset="-78"/>
               </a:rPr>
               <a:t>أَنْتَ مَرِيضٌ وَلَا تَسْتَطِيعُ الذَّهَابَ إِلَى المَدْرَسَةِ. اكْتُبْ رِسَالَةً إِلَى مُعَلِّمِكَ (٨٠–٩٠ كَلِمَةً).</a:t>
@@ -24415,6 +24555,7 @@
                   <a:srgbClr val="1B3B6F"/>
                 </a:solidFill>
                 <a:latin typeface="Amiri" pitchFamily="2" charset="-78"/>
+                <a:ea typeface="Amiri" pitchFamily="2" charset="-78"/>
                 <a:cs typeface="Amiri" pitchFamily="2" charset="-78"/>
               </a:rPr>
               <a:t>لِمَاذَا لَا تَسْتَطِيعُ الحُضُورَ؟</a:t>
@@ -24556,6 +24697,7 @@
                   <a:srgbClr val="1B3B6F"/>
                 </a:solidFill>
                 <a:latin typeface="Amiri" pitchFamily="2" charset="-78"/>
+                <a:ea typeface="Amiri" pitchFamily="2" charset="-78"/>
                 <a:cs typeface="Amiri" pitchFamily="2" charset="-78"/>
               </a:rPr>
               <a:t>مَا الأَعْرَاضُ؟ وَمُنْذُ مَتَى أَنْتَ مَرِيضٌ؟</a:t>
@@ -24697,6 +24839,7 @@
                   <a:srgbClr val="1B3B6F"/>
                 </a:solidFill>
                 <a:latin typeface="Amiri" pitchFamily="2" charset="-78"/>
+                <a:ea typeface="Amiri" pitchFamily="2" charset="-78"/>
                 <a:cs typeface="Amiri" pitchFamily="2" charset="-78"/>
               </a:rPr>
               <a:t>مَاذَا فَعَلْتَ أَمْسِ بِسَبَبِ المَرَضِ؟</a:t>
@@ -24838,6 +24981,7 @@
                   <a:srgbClr val="1B3B6F"/>
                 </a:solidFill>
                 <a:latin typeface="Amiri" pitchFamily="2" charset="-78"/>
+                <a:ea typeface="Amiri" pitchFamily="2" charset="-78"/>
                 <a:cs typeface="Amiri" pitchFamily="2" charset="-78"/>
               </a:rPr>
               <a:t>مَتَى سَتَرْجِعُ؟ وَمَاذَا تَطْلُبُ مِنْ مُعَلِّمِكَ؟</a:t>
@@ -25047,6 +25191,7 @@
                   <a:srgbClr val="D4AF37"/>
                 </a:solidFill>
                 <a:latin typeface="Amiri" pitchFamily="2" charset="-78"/>
+                <a:ea typeface="Amiri" pitchFamily="2" charset="-78"/>
                 <a:cs typeface="Amiri" pitchFamily="2" charset="-78"/>
               </a:rPr>
               <a:t>م</a:t>
@@ -25367,6 +25512,7 @@
                   <a:srgbClr val="8A6D1E"/>
                 </a:solidFill>
                 <a:latin typeface="Amiri" pitchFamily="2" charset="-78"/>
+                <a:ea typeface="Amiri" pitchFamily="2" charset="-78"/>
                 <a:cs typeface="Amiri" pitchFamily="2" charset="-78"/>
               </a:rPr>
               <a:t>قَوَالِبُ الكِتَابَةِ</a:t>
@@ -25647,6 +25793,7 @@
                   <a:srgbClr val="1B3B6F"/>
                 </a:solidFill>
                 <a:latin typeface="Amiri" pitchFamily="2" charset="-78"/>
+                <a:ea typeface="Amiri" pitchFamily="2" charset="-78"/>
                 <a:cs typeface="Amiri" pitchFamily="2" charset="-78"/>
               </a:rPr>
               <a:t>مَرْحَبًا يَا أُسْتَاذُ ______ ، أَنَا ______ مِنَ الصَّفِّ ______ .</a:t>
@@ -25853,6 +26000,7 @@
                   <a:srgbClr val="1B3B6F"/>
                 </a:solidFill>
                 <a:latin typeface="Amiri" pitchFamily="2" charset="-78"/>
+                <a:ea typeface="Amiri" pitchFamily="2" charset="-78"/>
                 <a:cs typeface="Amiri" pitchFamily="2" charset="-78"/>
               </a:rPr>
               <a:t>أَنَا آسِفٌ، لَا أَسْتَطِيعُ أَنْ آتِيَ، لِأَنِّي ______ .</a:t>
@@ -26059,6 +26207,7 @@
                   <a:srgbClr val="1B3B6F"/>
                 </a:solidFill>
                 <a:latin typeface="Amiri" pitchFamily="2" charset="-78"/>
+                <a:ea typeface="Amiri" pitchFamily="2" charset="-78"/>
                 <a:cs typeface="Amiri" pitchFamily="2" charset="-78"/>
               </a:rPr>
               <a:t>عِنْدِي ______ ، وَيُؤْلِمُنِي ______ ، مُنْذُ ______ .</a:t>
@@ -26265,6 +26414,7 @@
                   <a:srgbClr val="1B3B6F"/>
                 </a:solidFill>
                 <a:latin typeface="Amiri" pitchFamily="2" charset="-78"/>
+                <a:ea typeface="Amiri" pitchFamily="2" charset="-78"/>
                 <a:cs typeface="Amiri" pitchFamily="2" charset="-78"/>
               </a:rPr>
               <a:t>أَمْسِ ذَهَبْتُ إِلَى ______ وَ ______ .</a:t>
@@ -26471,6 +26621,7 @@
                   <a:srgbClr val="1B3B6F"/>
                 </a:solidFill>
                 <a:latin typeface="Amiri" pitchFamily="2" charset="-78"/>
+                <a:ea typeface="Amiri" pitchFamily="2" charset="-78"/>
                 <a:cs typeface="Amiri" pitchFamily="2" charset="-78"/>
               </a:rPr>
               <a:t>سَأَرْجِعُ يَوْمَ ______ . هَلْ يُمْكِنُ أَنْ ______ ؟</a:t>
@@ -26677,6 +26828,7 @@
                   <a:srgbClr val="1B3B6F"/>
                 </a:solidFill>
                 <a:latin typeface="Amiri" pitchFamily="2" charset="-78"/>
+                <a:ea typeface="Amiri" pitchFamily="2" charset="-78"/>
                 <a:cs typeface="Amiri" pitchFamily="2" charset="-78"/>
               </a:rPr>
               <a:t>شُكْرًا جَزِيلًا، ______</a:t>
@@ -26916,13 +27068,9 @@
     <a:fontScheme name="Office">
       <a:majorFont>
         <a:latin typeface="Calibri Light" panose="020F0302020204030204"/>
-        <a:ea typeface=""/>
-        <a:cs typeface=""/>
-        <a:font script="Jpan" typeface="游ゴシック Light"/>
-        <a:font script="Hang" typeface="맑은 고딕"/>
-        <a:font script="Hans" typeface="等线 Light"/>
-        <a:font script="Hant" typeface="新細明體"/>
-        <a:font script="Arab" typeface="Times New Roman"/>
+        <a:ea typeface="Amiri" pitchFamily="2" charset="-78"/>
+        <a:cs typeface="Amiri" pitchFamily="2" charset="-78"/>
+        <a:font script="Arab" typeface="Amiri"/>
         <a:font script="Hebr" typeface="Times New Roman"/>
         <a:font script="Thai" typeface="Angsana New"/>
         <a:font script="Ethi" typeface="Nyala"/>
@@ -26968,13 +27116,9 @@
       </a:majorFont>
       <a:minorFont>
         <a:latin typeface="Calibri" panose="020F0502020204030204"/>
-        <a:ea typeface=""/>
-        <a:cs typeface=""/>
-        <a:font script="Jpan" typeface="游ゴシック"/>
-        <a:font script="Hang" typeface="맑은 고딕"/>
-        <a:font script="Hans" typeface="等线"/>
-        <a:font script="Hant" typeface="新細明體"/>
-        <a:font script="Arab" typeface="Arial"/>
+        <a:ea typeface="Amiri" pitchFamily="2" charset="-78"/>
+        <a:cs typeface="Amiri" pitchFamily="2" charset="-78"/>
+        <a:font script="Arab" typeface="Amiri"/>
         <a:font script="Hebr" typeface="Arial"/>
         <a:font script="Thai" typeface="Cordia New"/>
         <a:font script="Ethi" typeface="Nyala"/>

--- a/Topic_A/Exam_Practice/AT-A-L07_Writing_Workshop_Body_Parts_and_Health_Problems.pptx
+++ b/Topic_A/Exam_Practice/AT-A-L07_Writing_Workshop_Body_Parts_and_Health_Problems.pptx
@@ -3848,7 +3848,7 @@
                 <a:solidFill>
                   <a:srgbClr val="FFFFFF"/>
                 </a:solidFill>
-                <a:latin typeface="Calibri" pitchFamily="34" charset="0"/>
+                <a:latin typeface="Amiri" pitchFamily="2" charset="-78"/>
                 <a:ea typeface="Amiri" pitchFamily="2" charset="-78"/>
                 <a:cs typeface="Amiri" pitchFamily="2" charset="-78"/>
               </a:rPr>
@@ -3914,7 +3914,7 @@
                 <a:solidFill>
                   <a:srgbClr val="FFFFFF"/>
                 </a:solidFill>
-                <a:latin typeface="Calibri" pitchFamily="34" charset="0"/>
+                <a:latin typeface="Amiri" pitchFamily="2" charset="-78"/>
                 <a:ea typeface="Amiri" pitchFamily="2" charset="-78"/>
                 <a:cs typeface="Amiri" pitchFamily="2" charset="-78"/>
               </a:rPr>
@@ -3980,7 +3980,7 @@
                 <a:solidFill>
                   <a:srgbClr val="FFFFFF"/>
                 </a:solidFill>
-                <a:latin typeface="Calibri" pitchFamily="34" charset="0"/>
+                <a:latin typeface="Amiri" pitchFamily="2" charset="-78"/>
                 <a:ea typeface="Amiri" pitchFamily="2" charset="-78"/>
                 <a:cs typeface="Amiri" pitchFamily="2" charset="-78"/>
               </a:rPr>
@@ -4046,7 +4046,7 @@
                 <a:solidFill>
                   <a:srgbClr val="FFFFFF"/>
                 </a:solidFill>
-                <a:latin typeface="Calibri" pitchFamily="34" charset="0"/>
+                <a:latin typeface="Amiri" pitchFamily="2" charset="-78"/>
                 <a:ea typeface="Amiri" pitchFamily="2" charset="-78"/>
                 <a:cs typeface="Amiri" pitchFamily="2" charset="-78"/>
               </a:rPr>
@@ -4844,7 +4844,7 @@
                 <a:solidFill>
                   <a:srgbClr val="FFFFFF"/>
                 </a:solidFill>
-                <a:latin typeface="Calibri" pitchFamily="34" charset="0"/>
+                <a:latin typeface="Amiri" pitchFamily="2" charset="-78"/>
                 <a:ea typeface="Amiri" pitchFamily="2" charset="-78"/>
                 <a:cs typeface="Amiri" pitchFamily="2" charset="-78"/>
               </a:rPr>
@@ -4910,7 +4910,7 @@
                 <a:solidFill>
                   <a:srgbClr val="FFFFFF"/>
                 </a:solidFill>
-                <a:latin typeface="Calibri" pitchFamily="34" charset="0"/>
+                <a:latin typeface="Amiri" pitchFamily="2" charset="-78"/>
                 <a:ea typeface="Amiri" pitchFamily="2" charset="-78"/>
                 <a:cs typeface="Amiri" pitchFamily="2" charset="-78"/>
               </a:rPr>
@@ -4976,7 +4976,7 @@
                 <a:solidFill>
                   <a:srgbClr val="FFFFFF"/>
                 </a:solidFill>
-                <a:latin typeface="Calibri" pitchFamily="34" charset="0"/>
+                <a:latin typeface="Amiri" pitchFamily="2" charset="-78"/>
                 <a:ea typeface="Amiri" pitchFamily="2" charset="-78"/>
                 <a:cs typeface="Amiri" pitchFamily="2" charset="-78"/>
               </a:rPr>
@@ -5042,7 +5042,7 @@
                 <a:solidFill>
                   <a:srgbClr val="FFFFFF"/>
                 </a:solidFill>
-                <a:latin typeface="Calibri" pitchFamily="34" charset="0"/>
+                <a:latin typeface="Amiri" pitchFamily="2" charset="-78"/>
                 <a:ea typeface="Amiri" pitchFamily="2" charset="-78"/>
                 <a:cs typeface="Amiri" pitchFamily="2" charset="-78"/>
               </a:rPr>
@@ -8602,7 +8602,7 @@
                 <a:solidFill>
                   <a:srgbClr val="FFFFFF"/>
                 </a:solidFill>
-                <a:latin typeface="Calibri" pitchFamily="34" charset="0"/>
+                <a:latin typeface="Amiri" pitchFamily="2" charset="-78"/>
                 <a:ea typeface="Amiri" pitchFamily="2" charset="-78"/>
                 <a:cs typeface="Amiri" pitchFamily="2" charset="-78"/>
               </a:rPr>
@@ -8668,7 +8668,7 @@
                 <a:solidFill>
                   <a:srgbClr val="FFFFFF"/>
                 </a:solidFill>
-                <a:latin typeface="Calibri" pitchFamily="34" charset="0"/>
+                <a:latin typeface="Amiri" pitchFamily="2" charset="-78"/>
                 <a:ea typeface="Amiri" pitchFamily="2" charset="-78"/>
                 <a:cs typeface="Amiri" pitchFamily="2" charset="-78"/>
               </a:rPr>
@@ -8734,7 +8734,7 @@
                 <a:solidFill>
                   <a:srgbClr val="FFFFFF"/>
                 </a:solidFill>
-                <a:latin typeface="Calibri" pitchFamily="34" charset="0"/>
+                <a:latin typeface="Amiri" pitchFamily="2" charset="-78"/>
                 <a:ea typeface="Amiri" pitchFamily="2" charset="-78"/>
                 <a:cs typeface="Amiri" pitchFamily="2" charset="-78"/>
               </a:rPr>
@@ -8800,7 +8800,7 @@
                 <a:solidFill>
                   <a:srgbClr val="FFFFFF"/>
                 </a:solidFill>
-                <a:latin typeface="Calibri" pitchFamily="34" charset="0"/>
+                <a:latin typeface="Amiri" pitchFamily="2" charset="-78"/>
                 <a:ea typeface="Amiri" pitchFamily="2" charset="-78"/>
                 <a:cs typeface="Amiri" pitchFamily="2" charset="-78"/>
               </a:rPr>
@@ -9587,7 +9587,7 @@
                 <a:solidFill>
                   <a:srgbClr val="FFFFFF"/>
                 </a:solidFill>
-                <a:latin typeface="Calibri" pitchFamily="34" charset="0"/>
+                <a:latin typeface="Amiri" pitchFamily="2" charset="-78"/>
                 <a:ea typeface="Amiri" pitchFamily="2" charset="-78"/>
                 <a:cs typeface="Amiri" pitchFamily="2" charset="-78"/>
               </a:rPr>
@@ -9653,7 +9653,7 @@
                 <a:solidFill>
                   <a:srgbClr val="FFFFFF"/>
                 </a:solidFill>
-                <a:latin typeface="Calibri" pitchFamily="34" charset="0"/>
+                <a:latin typeface="Amiri" pitchFamily="2" charset="-78"/>
                 <a:ea typeface="Amiri" pitchFamily="2" charset="-78"/>
                 <a:cs typeface="Amiri" pitchFamily="2" charset="-78"/>
               </a:rPr>
@@ -9719,7 +9719,7 @@
                 <a:solidFill>
                   <a:srgbClr val="FFFFFF"/>
                 </a:solidFill>
-                <a:latin typeface="Calibri" pitchFamily="34" charset="0"/>
+                <a:latin typeface="Amiri" pitchFamily="2" charset="-78"/>
                 <a:ea typeface="Amiri" pitchFamily="2" charset="-78"/>
                 <a:cs typeface="Amiri" pitchFamily="2" charset="-78"/>
               </a:rPr>
@@ -9785,7 +9785,7 @@
                 <a:solidFill>
                   <a:srgbClr val="FFFFFF"/>
                 </a:solidFill>
-                <a:latin typeface="Calibri" pitchFamily="34" charset="0"/>
+                <a:latin typeface="Amiri" pitchFamily="2" charset="-78"/>
                 <a:ea typeface="Amiri" pitchFamily="2" charset="-78"/>
                 <a:cs typeface="Amiri" pitchFamily="2" charset="-78"/>
               </a:rPr>
@@ -10572,7 +10572,7 @@
                 <a:solidFill>
                   <a:srgbClr val="FFFFFF"/>
                 </a:solidFill>
-                <a:latin typeface="Calibri" pitchFamily="34" charset="0"/>
+                <a:latin typeface="Amiri" pitchFamily="2" charset="-78"/>
                 <a:ea typeface="Amiri" pitchFamily="2" charset="-78"/>
                 <a:cs typeface="Amiri" pitchFamily="2" charset="-78"/>
               </a:rPr>
@@ -10638,7 +10638,7 @@
                 <a:solidFill>
                   <a:srgbClr val="FFFFFF"/>
                 </a:solidFill>
-                <a:latin typeface="Calibri" pitchFamily="34" charset="0"/>
+                <a:latin typeface="Amiri" pitchFamily="2" charset="-78"/>
                 <a:ea typeface="Amiri" pitchFamily="2" charset="-78"/>
                 <a:cs typeface="Amiri" pitchFamily="2" charset="-78"/>
               </a:rPr>
@@ -10704,7 +10704,7 @@
                 <a:solidFill>
                   <a:srgbClr val="FFFFFF"/>
                 </a:solidFill>
-                <a:latin typeface="Calibri" pitchFamily="34" charset="0"/>
+                <a:latin typeface="Amiri" pitchFamily="2" charset="-78"/>
                 <a:ea typeface="Amiri" pitchFamily="2" charset="-78"/>
                 <a:cs typeface="Amiri" pitchFamily="2" charset="-78"/>
               </a:rPr>
@@ -10770,7 +10770,7 @@
                 <a:solidFill>
                   <a:srgbClr val="FFFFFF"/>
                 </a:solidFill>
-                <a:latin typeface="Calibri" pitchFamily="34" charset="0"/>
+                <a:latin typeface="Amiri" pitchFamily="2" charset="-78"/>
                 <a:ea typeface="Amiri" pitchFamily="2" charset="-78"/>
                 <a:cs typeface="Amiri" pitchFamily="2" charset="-78"/>
               </a:rPr>
